--- a/deep_learning/1_ANN/activation-function/activation-functions-types.pptx
+++ b/deep_learning/1_ANN/activation-function/activation-functions-types.pptx
@@ -5,10 +5,10 @@
     <p:sldMasterId id="2147483648" r:id="rId1"/>
   </p:sldMasterIdLst>
   <p:notesMasterIdLst>
-    <p:notesMasterId r:id="rId23"/>
+    <p:notesMasterId r:id="rId19"/>
   </p:notesMasterIdLst>
   <p:handoutMasterIdLst>
-    <p:handoutMasterId r:id="rId24"/>
+    <p:handoutMasterId r:id="rId20"/>
   </p:handoutMasterIdLst>
   <p:sldIdLst>
     <p:sldId id="256" r:id="rId2"/>
@@ -24,14 +24,10 @@
     <p:sldId id="307" r:id="rId12"/>
     <p:sldId id="301" r:id="rId13"/>
     <p:sldId id="308" r:id="rId14"/>
-    <p:sldId id="295" r:id="rId15"/>
-    <p:sldId id="297" r:id="rId16"/>
-    <p:sldId id="296" r:id="rId17"/>
-    <p:sldId id="298" r:id="rId18"/>
-    <p:sldId id="276" r:id="rId19"/>
-    <p:sldId id="277" r:id="rId20"/>
-    <p:sldId id="278" r:id="rId21"/>
-    <p:sldId id="275" r:id="rId22"/>
+    <p:sldId id="276" r:id="rId15"/>
+    <p:sldId id="277" r:id="rId16"/>
+    <p:sldId id="278" r:id="rId17"/>
+    <p:sldId id="275" r:id="rId18"/>
   </p:sldIdLst>
   <p:sldSz cx="12192000" cy="6858000"/>
   <p:notesSz cx="6858000" cy="9144000"/>
@@ -235,7 +231,7 @@
           <a:p>
             <a:fld id="{7BAEECA8-D063-486F-AE31-5020270C1449}" type="datetimeFigureOut">
               <a:rPr lang="en-US" smtClean="0"/>
-              <a:t>3/9/2026</a:t>
+              <a:t>4/1/2026</a:t>
             </a:fld>
             <a:endParaRPr lang="en-US"/>
           </a:p>
@@ -412,7 +408,7 @@
           <a:p>
             <a:fld id="{CB233BD1-3BA8-448D-9D08-7846095EA517}" type="datetimeFigureOut">
               <a:rPr lang="en-US" smtClean="0"/>
-              <a:t>3/9/2026</a:t>
+              <a:t>4/1/2026</a:t>
             </a:fld>
             <a:endParaRPr lang="en-US"/>
           </a:p>
@@ -826,7 +822,7 @@
           <a:p>
             <a:fld id="{6383FAE1-13DE-4511-8C1B-C8AFB720664C}" type="datetimeFigureOut">
               <a:rPr lang="en-US" smtClean="0"/>
-              <a:t>3/9/2026</a:t>
+              <a:t>4/1/2026</a:t>
             </a:fld>
             <a:endParaRPr lang="en-US"/>
           </a:p>
@@ -1024,7 +1020,7 @@
           <a:p>
             <a:fld id="{6383FAE1-13DE-4511-8C1B-C8AFB720664C}" type="datetimeFigureOut">
               <a:rPr lang="en-US" smtClean="0"/>
-              <a:t>3/9/2026</a:t>
+              <a:t>4/1/2026</a:t>
             </a:fld>
             <a:endParaRPr lang="en-US"/>
           </a:p>
@@ -1232,7 +1228,7 @@
           <a:p>
             <a:fld id="{6383FAE1-13DE-4511-8C1B-C8AFB720664C}" type="datetimeFigureOut">
               <a:rPr lang="en-US" smtClean="0"/>
-              <a:t>3/9/2026</a:t>
+              <a:t>4/1/2026</a:t>
             </a:fld>
             <a:endParaRPr lang="en-US"/>
           </a:p>
@@ -1430,7 +1426,7 @@
           <a:p>
             <a:fld id="{6383FAE1-13DE-4511-8C1B-C8AFB720664C}" type="datetimeFigureOut">
               <a:rPr lang="en-US" smtClean="0"/>
-              <a:t>3/9/2026</a:t>
+              <a:t>4/1/2026</a:t>
             </a:fld>
             <a:endParaRPr lang="en-US"/>
           </a:p>
@@ -1705,7 +1701,7 @@
           <a:p>
             <a:fld id="{6383FAE1-13DE-4511-8C1B-C8AFB720664C}" type="datetimeFigureOut">
               <a:rPr lang="en-US" smtClean="0"/>
-              <a:t>3/9/2026</a:t>
+              <a:t>4/1/2026</a:t>
             </a:fld>
             <a:endParaRPr lang="en-US"/>
           </a:p>
@@ -1970,7 +1966,7 @@
           <a:p>
             <a:fld id="{6383FAE1-13DE-4511-8C1B-C8AFB720664C}" type="datetimeFigureOut">
               <a:rPr lang="en-US" smtClean="0"/>
-              <a:t>3/9/2026</a:t>
+              <a:t>4/1/2026</a:t>
             </a:fld>
             <a:endParaRPr lang="en-US"/>
           </a:p>
@@ -2382,7 +2378,7 @@
           <a:p>
             <a:fld id="{6383FAE1-13DE-4511-8C1B-C8AFB720664C}" type="datetimeFigureOut">
               <a:rPr lang="en-US" smtClean="0"/>
-              <a:t>3/9/2026</a:t>
+              <a:t>4/1/2026</a:t>
             </a:fld>
             <a:endParaRPr lang="en-US"/>
           </a:p>
@@ -2523,7 +2519,7 @@
           <a:p>
             <a:fld id="{6383FAE1-13DE-4511-8C1B-C8AFB720664C}" type="datetimeFigureOut">
               <a:rPr lang="en-US" smtClean="0"/>
-              <a:t>3/9/2026</a:t>
+              <a:t>4/1/2026</a:t>
             </a:fld>
             <a:endParaRPr lang="en-US"/>
           </a:p>
@@ -2636,7 +2632,7 @@
           <a:p>
             <a:fld id="{6383FAE1-13DE-4511-8C1B-C8AFB720664C}" type="datetimeFigureOut">
               <a:rPr lang="en-US" smtClean="0"/>
-              <a:t>3/9/2026</a:t>
+              <a:t>4/1/2026</a:t>
             </a:fld>
             <a:endParaRPr lang="en-US"/>
           </a:p>
@@ -2947,7 +2943,7 @@
           <a:p>
             <a:fld id="{6383FAE1-13DE-4511-8C1B-C8AFB720664C}" type="datetimeFigureOut">
               <a:rPr lang="en-US" smtClean="0"/>
-              <a:t>3/9/2026</a:t>
+              <a:t>4/1/2026</a:t>
             </a:fld>
             <a:endParaRPr lang="en-US"/>
           </a:p>
@@ -3238,7 +3234,7 @@
           <a:p>
             <a:fld id="{6383FAE1-13DE-4511-8C1B-C8AFB720664C}" type="datetimeFigureOut">
               <a:rPr lang="en-US" smtClean="0"/>
-              <a:t>3/9/2026</a:t>
+              <a:t>4/1/2026</a:t>
             </a:fld>
             <a:endParaRPr lang="en-US"/>
           </a:p>
@@ -3482,7 +3478,7 @@
           <a:p>
             <a:fld id="{6383FAE1-13DE-4511-8C1B-C8AFB720664C}" type="datetimeFigureOut">
               <a:rPr lang="en-US" smtClean="0"/>
-              <a:t>3/9/2026</a:t>
+              <a:t>4/1/2026</a:t>
             </a:fld>
             <a:endParaRPr lang="en-US"/>
           </a:p>
@@ -4213,7 +4209,6 @@
             </a:r>
           </a:p>
           <a:p>
-            <a:pPr/>
             <a:endParaRPr lang="en-US" sz="2400" dirty="0">
               <a:solidFill>
                 <a:schemeClr val="bg1"/>
@@ -4221,7 +4216,6 @@
             </a:endParaRPr>
           </a:p>
           <a:p>
-            <a:pPr/>
             <a:endParaRPr lang="en-US" sz="2400" dirty="0">
               <a:solidFill>
                 <a:schemeClr val="bg1"/>
@@ -4229,7 +4223,6 @@
             </a:endParaRPr>
           </a:p>
           <a:p>
-            <a:pPr/>
             <a:endParaRPr lang="en-US" sz="2400" dirty="0">
               <a:solidFill>
                 <a:schemeClr val="bg1"/>
@@ -4237,7 +4230,6 @@
             </a:endParaRPr>
           </a:p>
           <a:p>
-            <a:pPr/>
             <a:r>
               <a:rPr lang="en-US" sz="2400" dirty="0">
                 <a:solidFill>
@@ -4977,7 +4969,7 @@
         </p:blipFill>
         <p:spPr>
           <a:xfrm>
-            <a:off x="4848855" y="627493"/>
+            <a:off x="4848855" y="590917"/>
             <a:ext cx="7179858" cy="6207999"/>
           </a:xfrm>
           <a:prstGeom prst="rect">
@@ -5028,1535 +5020,6 @@
 </file>
 
 <file path=ppt/slides/slide14.xml><?xml version="1.0" encoding="utf-8"?>
-<p:sld xmlns:a="http://schemas.openxmlformats.org/drawingml/2006/main" xmlns:r="http://schemas.openxmlformats.org/officeDocument/2006/relationships" xmlns:p="http://schemas.openxmlformats.org/presentationml/2006/main">
-  <p:cSld>
-    <p:spTree>
-      <p:nvGrpSpPr>
-        <p:cNvPr id="1" name=""/>
-        <p:cNvGrpSpPr/>
-        <p:nvPr/>
-      </p:nvGrpSpPr>
-      <p:grpSpPr>
-        <a:xfrm>
-          <a:off x="0" y="0"/>
-          <a:ext cx="0" cy="0"/>
-          <a:chOff x="0" y="0"/>
-          <a:chExt cx="0" cy="0"/>
-        </a:xfrm>
-      </p:grpSpPr>
-      <p:sp>
-        <p:nvSpPr>
-          <p:cNvPr id="17" name="TextBox 16">
-            <a:extLst>
-              <a:ext uri="{FF2B5EF4-FFF2-40B4-BE49-F238E27FC236}">
-                <a16:creationId xmlns:a16="http://schemas.microsoft.com/office/drawing/2014/main" id="{0C1FEDB0-2282-60F1-A0A6-6A3AC7B46492}"/>
-              </a:ext>
-            </a:extLst>
-          </p:cNvPr>
-          <p:cNvSpPr txBox="1"/>
-          <p:nvPr/>
-        </p:nvSpPr>
-        <p:spPr>
-          <a:xfrm>
-            <a:off x="258924" y="224134"/>
-            <a:ext cx="11478986" cy="1200329"/>
-          </a:xfrm>
-          <a:prstGeom prst="rect">
-            <a:avLst/>
-          </a:prstGeom>
-          <a:noFill/>
-        </p:spPr>
-        <p:txBody>
-          <a:bodyPr wrap="square">
-            <a:spAutoFit/>
-          </a:bodyPr>
-          <a:lstStyle/>
-          <a:p>
-            <a:r>
-              <a:rPr lang="en-US" dirty="0">
-                <a:solidFill>
-                  <a:schemeClr val="accent6">
-                    <a:lumMod val="60000"/>
-                    <a:lumOff val="40000"/>
-                  </a:schemeClr>
-                </a:solidFill>
-              </a:rPr>
-              <a:t>What type of activation unction should be used on output layer?</a:t>
-            </a:r>
-          </a:p>
-          <a:p>
-            <a:endParaRPr lang="en-US" dirty="0">
-              <a:solidFill>
-                <a:schemeClr val="accent6">
-                  <a:lumMod val="60000"/>
-                  <a:lumOff val="40000"/>
-                </a:schemeClr>
-              </a:solidFill>
-            </a:endParaRPr>
-          </a:p>
-          <a:p>
-            <a:r>
-              <a:rPr lang="en-US" b="1" dirty="0">
-                <a:solidFill>
-                  <a:schemeClr val="accent6">
-                    <a:lumMod val="60000"/>
-                    <a:lumOff val="40000"/>
-                  </a:schemeClr>
-                </a:solidFill>
-              </a:rPr>
-              <a:t>Choice of activation function in the output layer</a:t>
-            </a:r>
-            <a:r>
-              <a:rPr lang="en-US" dirty="0">
-                <a:solidFill>
-                  <a:schemeClr val="accent6">
-                    <a:lumMod val="60000"/>
-                    <a:lumOff val="40000"/>
-                  </a:schemeClr>
-                </a:solidFill>
-              </a:rPr>
-              <a:t> depends directly on the </a:t>
-            </a:r>
-            <a:r>
-              <a:rPr lang="en-US" b="1" dirty="0">
-                <a:solidFill>
-                  <a:schemeClr val="accent6">
-                    <a:lumMod val="60000"/>
-                    <a:lumOff val="40000"/>
-                  </a:schemeClr>
-                </a:solidFill>
-              </a:rPr>
-              <a:t>type of problem</a:t>
-            </a:r>
-            <a:r>
-              <a:rPr lang="en-US" dirty="0">
-                <a:solidFill>
-                  <a:schemeClr val="accent6">
-                    <a:lumMod val="60000"/>
-                    <a:lumOff val="40000"/>
-                  </a:schemeClr>
-                </a:solidFill>
-              </a:rPr>
-              <a:t> you’re solving with an Artificial Neural Network (ANN).</a:t>
-            </a:r>
-            <a:endParaRPr lang="en-IN" dirty="0">
-              <a:solidFill>
-                <a:schemeClr val="accent6">
-                  <a:lumMod val="60000"/>
-                  <a:lumOff val="40000"/>
-                </a:schemeClr>
-              </a:solidFill>
-            </a:endParaRPr>
-          </a:p>
-        </p:txBody>
-      </p:sp>
-      <p:sp>
-        <p:nvSpPr>
-          <p:cNvPr id="19" name="TextBox 18">
-            <a:extLst>
-              <a:ext uri="{FF2B5EF4-FFF2-40B4-BE49-F238E27FC236}">
-                <a16:creationId xmlns:a16="http://schemas.microsoft.com/office/drawing/2014/main" id="{8C974F1F-30D0-5705-B630-8B553BA2C881}"/>
-              </a:ext>
-            </a:extLst>
-          </p:cNvPr>
-          <p:cNvSpPr txBox="1"/>
-          <p:nvPr/>
-        </p:nvSpPr>
-        <p:spPr>
-          <a:xfrm>
-            <a:off x="286917" y="1511188"/>
-            <a:ext cx="8875371" cy="3970318"/>
-          </a:xfrm>
-          <a:prstGeom prst="rect">
-            <a:avLst/>
-          </a:prstGeom>
-          <a:noFill/>
-        </p:spPr>
-        <p:txBody>
-          <a:bodyPr wrap="square">
-            <a:spAutoFit/>
-          </a:bodyPr>
-          <a:lstStyle/>
-          <a:p>
-            <a:pPr>
-              <a:buNone/>
-            </a:pPr>
-            <a:r>
-              <a:rPr lang="en-IN" b="1" dirty="0">
-                <a:solidFill>
-                  <a:schemeClr val="accent6">
-                    <a:lumMod val="60000"/>
-                    <a:lumOff val="40000"/>
-                  </a:schemeClr>
-                </a:solidFill>
-              </a:rPr>
-              <a:t>1. Regression Problems</a:t>
-            </a:r>
-          </a:p>
-          <a:p>
-            <a:endParaRPr lang="en-IN" dirty="0">
-              <a:solidFill>
-                <a:schemeClr val="accent6">
-                  <a:lumMod val="60000"/>
-                  <a:lumOff val="40000"/>
-                </a:schemeClr>
-              </a:solidFill>
-            </a:endParaRPr>
-          </a:p>
-          <a:p>
-            <a:r>
-              <a:rPr lang="en-IN" dirty="0">
-                <a:solidFill>
-                  <a:schemeClr val="accent6">
-                    <a:lumMod val="60000"/>
-                    <a:lumOff val="40000"/>
-                  </a:schemeClr>
-                </a:solidFill>
-              </a:rPr>
-              <a:t>Goal: Predict continuous values (e.g., house prices, temperature).</a:t>
-            </a:r>
-          </a:p>
-          <a:p>
-            <a:endParaRPr lang="en-IN" b="1" dirty="0">
-              <a:solidFill>
-                <a:schemeClr val="accent6">
-                  <a:lumMod val="60000"/>
-                  <a:lumOff val="40000"/>
-                </a:schemeClr>
-              </a:solidFill>
-            </a:endParaRPr>
-          </a:p>
-          <a:p>
-            <a:r>
-              <a:rPr lang="en-IN" b="1" dirty="0">
-                <a:solidFill>
-                  <a:schemeClr val="accent6">
-                    <a:lumMod val="60000"/>
-                    <a:lumOff val="40000"/>
-                  </a:schemeClr>
-                </a:solidFill>
-              </a:rPr>
-              <a:t>Output activation:</a:t>
-            </a:r>
-            <a:endParaRPr lang="en-IN" dirty="0">
-              <a:solidFill>
-                <a:schemeClr val="accent6">
-                  <a:lumMod val="60000"/>
-                  <a:lumOff val="40000"/>
-                </a:schemeClr>
-              </a:solidFill>
-            </a:endParaRPr>
-          </a:p>
-          <a:p>
-            <a:pPr marL="742950" lvl="1" indent="-285750">
-              <a:buFont typeface="Arial" panose="020B0604020202020204" pitchFamily="34" charset="0"/>
-              <a:buChar char="•"/>
-            </a:pPr>
-            <a:r>
-              <a:rPr lang="en-IN" b="1" dirty="0">
-                <a:solidFill>
-                  <a:schemeClr val="accent6">
-                    <a:lumMod val="60000"/>
-                    <a:lumOff val="40000"/>
-                  </a:schemeClr>
-                </a:solidFill>
-              </a:rPr>
-              <a:t>Linear (identity)</a:t>
-            </a:r>
-            <a:r>
-              <a:rPr lang="en-IN" dirty="0">
-                <a:solidFill>
-                  <a:schemeClr val="accent6">
-                    <a:lumMod val="60000"/>
-                    <a:lumOff val="40000"/>
-                  </a:schemeClr>
-                </a:solidFill>
-              </a:rPr>
-              <a:t> → no activation, just raw output.      f(x)=x</a:t>
-            </a:r>
-          </a:p>
-          <a:p>
-            <a:pPr marL="742950" lvl="1" indent="-285750">
-              <a:buFont typeface="Arial" panose="020B0604020202020204" pitchFamily="34" charset="0"/>
-              <a:buChar char="•"/>
-            </a:pPr>
-            <a:r>
-              <a:rPr lang="en-IN" dirty="0">
-                <a:solidFill>
-                  <a:schemeClr val="accent6">
-                    <a:lumMod val="60000"/>
-                    <a:lumOff val="40000"/>
-                  </a:schemeClr>
-                </a:solidFill>
-              </a:rPr>
-              <a:t>Sometimes </a:t>
-            </a:r>
-            <a:r>
-              <a:rPr lang="en-IN" b="1" dirty="0" err="1">
-                <a:solidFill>
-                  <a:schemeClr val="accent6">
-                    <a:lumMod val="60000"/>
-                    <a:lumOff val="40000"/>
-                  </a:schemeClr>
-                </a:solidFill>
-              </a:rPr>
-              <a:t>ReLU</a:t>
-            </a:r>
-            <a:r>
-              <a:rPr lang="en-IN" dirty="0">
-                <a:solidFill>
-                  <a:schemeClr val="accent6">
-                    <a:lumMod val="60000"/>
-                    <a:lumOff val="40000"/>
-                  </a:schemeClr>
-                </a:solidFill>
-              </a:rPr>
-              <a:t> if the output can’t be negative (e.g., predicting age, distance).</a:t>
-            </a:r>
-          </a:p>
-          <a:p>
-            <a:endParaRPr lang="en-IN" b="1" dirty="0">
-              <a:solidFill>
-                <a:schemeClr val="accent6">
-                  <a:lumMod val="60000"/>
-                  <a:lumOff val="40000"/>
-                </a:schemeClr>
-              </a:solidFill>
-            </a:endParaRPr>
-          </a:p>
-          <a:p>
-            <a:r>
-              <a:rPr lang="en-IN" b="1" dirty="0">
-                <a:solidFill>
-                  <a:schemeClr val="accent6">
-                    <a:lumMod val="60000"/>
-                    <a:lumOff val="40000"/>
-                  </a:schemeClr>
-                </a:solidFill>
-              </a:rPr>
-              <a:t>Loss function used here</a:t>
-            </a:r>
-            <a:r>
-              <a:rPr lang="en-IN" dirty="0">
-                <a:solidFill>
-                  <a:schemeClr val="accent6">
-                    <a:lumMod val="60000"/>
-                    <a:lumOff val="40000"/>
-                  </a:schemeClr>
-                </a:solidFill>
-              </a:rPr>
-              <a:t>:</a:t>
-            </a:r>
-          </a:p>
-          <a:p>
-            <a:r>
-              <a:rPr lang="en-IN" b="1" dirty="0">
-                <a:solidFill>
-                  <a:schemeClr val="accent6">
-                    <a:lumMod val="60000"/>
-                    <a:lumOff val="40000"/>
-                  </a:schemeClr>
-                </a:solidFill>
-              </a:rPr>
-              <a:t>a) Mean Squared Error (MSE)</a:t>
-            </a:r>
-          </a:p>
-          <a:p>
-            <a:r>
-              <a:rPr lang="en-IN" b="1" dirty="0">
-                <a:solidFill>
-                  <a:schemeClr val="accent6">
-                    <a:lumMod val="60000"/>
-                    <a:lumOff val="40000"/>
-                  </a:schemeClr>
-                </a:solidFill>
-              </a:rPr>
-              <a:t>b) Mean Absolute Error (MAE)</a:t>
-            </a:r>
-            <a:r>
-              <a:rPr lang="en-IN" dirty="0">
-                <a:solidFill>
-                  <a:schemeClr val="accent6">
-                    <a:lumMod val="60000"/>
-                    <a:lumOff val="40000"/>
-                  </a:schemeClr>
-                </a:solidFill>
-              </a:rPr>
-              <a:t> if you care more about absolute deviations.</a:t>
-            </a:r>
-          </a:p>
-          <a:p>
-            <a:pPr marL="742950" lvl="1" indent="-285750">
-              <a:buFont typeface="Arial" panose="020B0604020202020204" pitchFamily="34" charset="0"/>
-              <a:buChar char="•"/>
-            </a:pPr>
-            <a:endParaRPr lang="en-IN" dirty="0">
-              <a:solidFill>
-                <a:schemeClr val="accent6">
-                  <a:lumMod val="60000"/>
-                  <a:lumOff val="40000"/>
-                </a:schemeClr>
-              </a:solidFill>
-            </a:endParaRPr>
-          </a:p>
-          <a:p>
-            <a:pPr marL="742950" lvl="1" indent="-285750">
-              <a:buFont typeface="Arial" panose="020B0604020202020204" pitchFamily="34" charset="0"/>
-              <a:buChar char="•"/>
-            </a:pPr>
-            <a:endParaRPr lang="en-IN" dirty="0">
-              <a:solidFill>
-                <a:schemeClr val="accent6">
-                  <a:lumMod val="60000"/>
-                  <a:lumOff val="40000"/>
-                </a:schemeClr>
-              </a:solidFill>
-            </a:endParaRPr>
-          </a:p>
-          <a:p>
-            <a:pPr>
-              <a:buNone/>
-            </a:pPr>
-            <a:r>
-              <a:rPr lang="en-IN" dirty="0">
-                <a:solidFill>
-                  <a:schemeClr val="accent6">
-                    <a:lumMod val="60000"/>
-                    <a:lumOff val="40000"/>
-                  </a:schemeClr>
-                </a:solidFill>
-              </a:rPr>
-              <a:t>Example: Predicting house price in dollars.</a:t>
-            </a:r>
-          </a:p>
-        </p:txBody>
-      </p:sp>
-      <p:pic>
-        <p:nvPicPr>
-          <p:cNvPr id="3" name="Picture 2">
-            <a:extLst>
-              <a:ext uri="{FF2B5EF4-FFF2-40B4-BE49-F238E27FC236}">
-                <a16:creationId xmlns:a16="http://schemas.microsoft.com/office/drawing/2014/main" id="{28D4A4A6-BEC9-F97A-0502-88F7D4DF5FB7}"/>
-              </a:ext>
-            </a:extLst>
-          </p:cNvPr>
-          <p:cNvPicPr>
-            <a:picLocks noChangeAspect="1"/>
-          </p:cNvPicPr>
-          <p:nvPr/>
-        </p:nvPicPr>
-        <p:blipFill>
-          <a:blip r:embed="rId2">
-            <a:extLst>
-              <a:ext uri="{28A0092B-C50C-407E-A947-70E740481C1C}">
-                <a14:useLocalDpi xmlns:a14="http://schemas.microsoft.com/office/drawing/2010/main" val="0"/>
-              </a:ext>
-            </a:extLst>
-          </a:blip>
-          <a:stretch>
-            <a:fillRect/>
-          </a:stretch>
-        </p:blipFill>
-        <p:spPr>
-          <a:xfrm>
-            <a:off x="8659456" y="3732726"/>
-            <a:ext cx="2644369" cy="586791"/>
-          </a:xfrm>
-          <a:prstGeom prst="rect">
-            <a:avLst/>
-          </a:prstGeom>
-        </p:spPr>
-      </p:pic>
-      <p:cxnSp>
-        <p:nvCxnSpPr>
-          <p:cNvPr id="5" name="Straight Arrow Connector 4">
-            <a:extLst>
-              <a:ext uri="{FF2B5EF4-FFF2-40B4-BE49-F238E27FC236}">
-                <a16:creationId xmlns:a16="http://schemas.microsoft.com/office/drawing/2014/main" id="{224F4F67-970D-538E-9C09-36379062CEB0}"/>
-              </a:ext>
-            </a:extLst>
-          </p:cNvPr>
-          <p:cNvCxnSpPr>
-            <a:cxnSpLocks/>
-          </p:cNvCxnSpPr>
-          <p:nvPr/>
-        </p:nvCxnSpPr>
-        <p:spPr>
-          <a:xfrm>
-            <a:off x="4435027" y="4191501"/>
-            <a:ext cx="3822093" cy="0"/>
-          </a:xfrm>
-          <a:prstGeom prst="straightConnector1">
-            <a:avLst/>
-          </a:prstGeom>
-          <a:ln>
-            <a:tailEnd type="triangle"/>
-          </a:ln>
-        </p:spPr>
-        <p:style>
-          <a:lnRef idx="3">
-            <a:schemeClr val="accent2"/>
-          </a:lnRef>
-          <a:fillRef idx="0">
-            <a:schemeClr val="accent2"/>
-          </a:fillRef>
-          <a:effectRef idx="2">
-            <a:schemeClr val="accent2"/>
-          </a:effectRef>
-          <a:fontRef idx="minor">
-            <a:schemeClr val="tx1"/>
-          </a:fontRef>
-        </p:style>
-      </p:cxnSp>
-    </p:spTree>
-    <p:extLst>
-      <p:ext uri="{BB962C8B-B14F-4D97-AF65-F5344CB8AC3E}">
-        <p14:creationId xmlns:p14="http://schemas.microsoft.com/office/powerpoint/2010/main" val="1803888221"/>
-      </p:ext>
-    </p:extLst>
-  </p:cSld>
-  <p:clrMapOvr>
-    <a:masterClrMapping/>
-  </p:clrMapOvr>
-</p:sld>
-</file>
-
-<file path=ppt/slides/slide15.xml><?xml version="1.0" encoding="utf-8"?>
-<p:sld xmlns:a="http://schemas.openxmlformats.org/drawingml/2006/main" xmlns:r="http://schemas.openxmlformats.org/officeDocument/2006/relationships" xmlns:p="http://schemas.openxmlformats.org/presentationml/2006/main">
-  <p:cSld>
-    <p:spTree>
-      <p:nvGrpSpPr>
-        <p:cNvPr id="1" name="">
-          <a:extLst>
-            <a:ext uri="{FF2B5EF4-FFF2-40B4-BE49-F238E27FC236}">
-              <a16:creationId xmlns:a16="http://schemas.microsoft.com/office/drawing/2014/main" id="{89607CCC-509C-7088-3B6F-214C72B36E27}"/>
-            </a:ext>
-          </a:extLst>
-        </p:cNvPr>
-        <p:cNvGrpSpPr/>
-        <p:nvPr/>
-      </p:nvGrpSpPr>
-      <p:grpSpPr>
-        <a:xfrm>
-          <a:off x="0" y="0"/>
-          <a:ext cx="0" cy="0"/>
-          <a:chOff x="0" y="0"/>
-          <a:chExt cx="0" cy="0"/>
-        </a:xfrm>
-      </p:grpSpPr>
-      <p:sp>
-        <p:nvSpPr>
-          <p:cNvPr id="21" name="TextBox 20">
-            <a:extLst>
-              <a:ext uri="{FF2B5EF4-FFF2-40B4-BE49-F238E27FC236}">
-                <a16:creationId xmlns:a16="http://schemas.microsoft.com/office/drawing/2014/main" id="{B04ED676-2D28-CA7E-3D6A-B94611A56BBC}"/>
-              </a:ext>
-            </a:extLst>
-          </p:cNvPr>
-          <p:cNvSpPr txBox="1"/>
-          <p:nvPr/>
-        </p:nvSpPr>
-        <p:spPr>
-          <a:xfrm>
-            <a:off x="100304" y="725960"/>
-            <a:ext cx="7056275" cy="2585323"/>
-          </a:xfrm>
-          <a:prstGeom prst="rect">
-            <a:avLst/>
-          </a:prstGeom>
-          <a:noFill/>
-        </p:spPr>
-        <p:txBody>
-          <a:bodyPr wrap="square">
-            <a:spAutoFit/>
-          </a:bodyPr>
-          <a:lstStyle/>
-          <a:p>
-            <a:pPr>
-              <a:buNone/>
-            </a:pPr>
-            <a:r>
-              <a:rPr lang="en-IN" b="1" dirty="0">
-                <a:solidFill>
-                  <a:schemeClr val="accent6">
-                    <a:lumMod val="60000"/>
-                    <a:lumOff val="40000"/>
-                  </a:schemeClr>
-                </a:solidFill>
-              </a:rPr>
-              <a:t>2. Binary Classification Problems</a:t>
-            </a:r>
-          </a:p>
-          <a:p>
-            <a:pPr>
-              <a:buNone/>
-            </a:pPr>
-            <a:endParaRPr lang="en-IN" b="1" dirty="0">
-              <a:solidFill>
-                <a:schemeClr val="accent6">
-                  <a:lumMod val="60000"/>
-                  <a:lumOff val="40000"/>
-                </a:schemeClr>
-              </a:solidFill>
-            </a:endParaRPr>
-          </a:p>
-          <a:p>
-            <a:pPr marL="285750" indent="-285750">
-              <a:buFont typeface="Arial" panose="020B0604020202020204" pitchFamily="34" charset="0"/>
-              <a:buChar char="•"/>
-            </a:pPr>
-            <a:r>
-              <a:rPr lang="en-IN" dirty="0">
-                <a:solidFill>
-                  <a:schemeClr val="accent6">
-                    <a:lumMod val="60000"/>
-                    <a:lumOff val="40000"/>
-                  </a:schemeClr>
-                </a:solidFill>
-              </a:rPr>
-              <a:t>Goal: Predict </a:t>
-            </a:r>
-            <a:r>
-              <a:rPr lang="en-IN" b="1" dirty="0">
-                <a:solidFill>
-                  <a:schemeClr val="accent6">
-                    <a:lumMod val="60000"/>
-                    <a:lumOff val="40000"/>
-                  </a:schemeClr>
-                </a:solidFill>
-              </a:rPr>
-              <a:t>two classes</a:t>
-            </a:r>
-            <a:r>
-              <a:rPr lang="en-IN" dirty="0">
-                <a:solidFill>
-                  <a:schemeClr val="accent6">
-                    <a:lumMod val="60000"/>
-                    <a:lumOff val="40000"/>
-                  </a:schemeClr>
-                </a:solidFill>
-              </a:rPr>
-              <a:t> (yes/no, spam/not spam).</a:t>
-            </a:r>
-          </a:p>
-          <a:p>
-            <a:pPr marL="285750" indent="-285750">
-              <a:buFont typeface="Arial" panose="020B0604020202020204" pitchFamily="34" charset="0"/>
-              <a:buChar char="•"/>
-            </a:pPr>
-            <a:r>
-              <a:rPr lang="en-IN" b="1" dirty="0">
-                <a:solidFill>
-                  <a:schemeClr val="accent6">
-                    <a:lumMod val="60000"/>
-                    <a:lumOff val="40000"/>
-                  </a:schemeClr>
-                </a:solidFill>
-              </a:rPr>
-              <a:t>Output activation:</a:t>
-            </a:r>
-            <a:endParaRPr lang="en-IN" dirty="0">
-              <a:solidFill>
-                <a:schemeClr val="accent6">
-                  <a:lumMod val="60000"/>
-                  <a:lumOff val="40000"/>
-                </a:schemeClr>
-              </a:solidFill>
-            </a:endParaRPr>
-          </a:p>
-          <a:p>
-            <a:pPr marL="742950" lvl="1" indent="-285750">
-              <a:buFont typeface="Arial" panose="020B0604020202020204" pitchFamily="34" charset="0"/>
-              <a:buChar char="•"/>
-            </a:pPr>
-            <a:r>
-              <a:rPr lang="en-IN" b="1" dirty="0">
-                <a:solidFill>
-                  <a:schemeClr val="accent6">
-                    <a:lumMod val="60000"/>
-                    <a:lumOff val="40000"/>
-                  </a:schemeClr>
-                </a:solidFill>
-              </a:rPr>
-              <a:t>Sigmoid</a:t>
-            </a:r>
-            <a:r>
-              <a:rPr lang="en-IN" dirty="0">
-                <a:solidFill>
-                  <a:schemeClr val="accent6">
-                    <a:lumMod val="60000"/>
-                    <a:lumOff val="40000"/>
-                  </a:schemeClr>
-                </a:solidFill>
-              </a:rPr>
-              <a:t> → squashes output to [0,1], interpretable as probability.</a:t>
-            </a:r>
-          </a:p>
-          <a:p>
-            <a:endParaRPr lang="en-US" b="1" dirty="0">
-              <a:solidFill>
-                <a:schemeClr val="accent6">
-                  <a:lumMod val="60000"/>
-                  <a:lumOff val="40000"/>
-                </a:schemeClr>
-              </a:solidFill>
-            </a:endParaRPr>
-          </a:p>
-          <a:p>
-            <a:r>
-              <a:rPr lang="en-US" b="1" dirty="0">
-                <a:solidFill>
-                  <a:schemeClr val="accent6">
-                    <a:lumMod val="60000"/>
-                    <a:lumOff val="40000"/>
-                  </a:schemeClr>
-                </a:solidFill>
-              </a:rPr>
-              <a:t>Loss function used here</a:t>
-            </a:r>
-            <a:r>
-              <a:rPr lang="en-US" dirty="0">
-                <a:solidFill>
-                  <a:schemeClr val="accent6">
-                    <a:lumMod val="60000"/>
-                    <a:lumOff val="40000"/>
-                  </a:schemeClr>
-                </a:solidFill>
-              </a:rPr>
-              <a:t>: </a:t>
-            </a:r>
-            <a:r>
-              <a:rPr lang="en-US" b="1" dirty="0">
-                <a:solidFill>
-                  <a:schemeClr val="accent6">
-                    <a:lumMod val="60000"/>
-                    <a:lumOff val="40000"/>
-                  </a:schemeClr>
-                </a:solidFill>
-              </a:rPr>
-              <a:t>Binary Cross-Entropy (Log Loss)</a:t>
-            </a:r>
-            <a:endParaRPr lang="en-US" dirty="0">
-              <a:solidFill>
-                <a:schemeClr val="accent6">
-                  <a:lumMod val="60000"/>
-                  <a:lumOff val="40000"/>
-                </a:schemeClr>
-              </a:solidFill>
-            </a:endParaRPr>
-          </a:p>
-          <a:p>
-            <a:pPr>
-              <a:buNone/>
-            </a:pPr>
-            <a:endParaRPr lang="en-IN" dirty="0">
-              <a:solidFill>
-                <a:schemeClr val="accent6">
-                  <a:lumMod val="60000"/>
-                  <a:lumOff val="40000"/>
-                </a:schemeClr>
-              </a:solidFill>
-            </a:endParaRPr>
-          </a:p>
-          <a:p>
-            <a:pPr>
-              <a:buNone/>
-            </a:pPr>
-            <a:r>
-              <a:rPr lang="en-IN" dirty="0">
-                <a:solidFill>
-                  <a:schemeClr val="accent6">
-                    <a:lumMod val="60000"/>
-                    <a:lumOff val="40000"/>
-                  </a:schemeClr>
-                </a:solidFill>
-              </a:rPr>
-              <a:t>Example: Predicting if a </a:t>
-            </a:r>
-            <a:r>
-              <a:rPr lang="en-IN" dirty="0" err="1">
-                <a:solidFill>
-                  <a:schemeClr val="accent6">
-                    <a:lumMod val="60000"/>
-                    <a:lumOff val="40000"/>
-                  </a:schemeClr>
-                </a:solidFill>
-              </a:rPr>
-              <a:t>tumor</a:t>
-            </a:r>
-            <a:r>
-              <a:rPr lang="en-IN" dirty="0">
-                <a:solidFill>
-                  <a:schemeClr val="accent6">
-                    <a:lumMod val="60000"/>
-                    <a:lumOff val="40000"/>
-                  </a:schemeClr>
-                </a:solidFill>
-              </a:rPr>
-              <a:t> is malignant (1) or benign (0).</a:t>
-            </a:r>
-          </a:p>
-        </p:txBody>
-      </p:sp>
-      <p:pic>
-        <p:nvPicPr>
-          <p:cNvPr id="23" name="Picture 22">
-            <a:extLst>
-              <a:ext uri="{FF2B5EF4-FFF2-40B4-BE49-F238E27FC236}">
-                <a16:creationId xmlns:a16="http://schemas.microsoft.com/office/drawing/2014/main" id="{4F679ED0-4915-3D25-E519-3AD39E03A93E}"/>
-              </a:ext>
-            </a:extLst>
-          </p:cNvPr>
-          <p:cNvPicPr>
-            <a:picLocks noChangeAspect="1"/>
-          </p:cNvPicPr>
-          <p:nvPr/>
-        </p:nvPicPr>
-        <p:blipFill>
-          <a:blip r:embed="rId2">
-            <a:extLst>
-              <a:ext uri="{28A0092B-C50C-407E-A947-70E740481C1C}">
-                <a14:useLocalDpi xmlns:a14="http://schemas.microsoft.com/office/drawing/2010/main" val="0"/>
-              </a:ext>
-            </a:extLst>
-          </a:blip>
-          <a:stretch>
-            <a:fillRect/>
-          </a:stretch>
-        </p:blipFill>
-        <p:spPr>
-          <a:xfrm>
-            <a:off x="8941610" y="1334016"/>
-            <a:ext cx="1661304" cy="662997"/>
-          </a:xfrm>
-          <a:prstGeom prst="rect">
-            <a:avLst/>
-          </a:prstGeom>
-        </p:spPr>
-      </p:pic>
-      <p:pic>
-        <p:nvPicPr>
-          <p:cNvPr id="3" name="Picture 2">
-            <a:extLst>
-              <a:ext uri="{FF2B5EF4-FFF2-40B4-BE49-F238E27FC236}">
-                <a16:creationId xmlns:a16="http://schemas.microsoft.com/office/drawing/2014/main" id="{DB5C8941-2330-24BC-0472-E903687A8056}"/>
-              </a:ext>
-            </a:extLst>
-          </p:cNvPr>
-          <p:cNvPicPr>
-            <a:picLocks noChangeAspect="1"/>
-          </p:cNvPicPr>
-          <p:nvPr/>
-        </p:nvPicPr>
-        <p:blipFill>
-          <a:blip r:embed="rId3">
-            <a:extLst>
-              <a:ext uri="{28A0092B-C50C-407E-A947-70E740481C1C}">
-                <a14:useLocalDpi xmlns:a14="http://schemas.microsoft.com/office/drawing/2010/main" val="0"/>
-              </a:ext>
-            </a:extLst>
-          </a:blip>
-          <a:stretch>
-            <a:fillRect/>
-          </a:stretch>
-        </p:blipFill>
-        <p:spPr>
-          <a:xfrm>
-            <a:off x="7483813" y="3093691"/>
-            <a:ext cx="4427604" cy="670618"/>
-          </a:xfrm>
-          <a:prstGeom prst="rect">
-            <a:avLst/>
-          </a:prstGeom>
-        </p:spPr>
-      </p:pic>
-    </p:spTree>
-    <p:extLst>
-      <p:ext uri="{BB962C8B-B14F-4D97-AF65-F5344CB8AC3E}">
-        <p14:creationId xmlns:p14="http://schemas.microsoft.com/office/powerpoint/2010/main" val="20788136"/>
-      </p:ext>
-    </p:extLst>
-  </p:cSld>
-  <p:clrMapOvr>
-    <a:masterClrMapping/>
-  </p:clrMapOvr>
-</p:sld>
-</file>
-
-<file path=ppt/slides/slide16.xml><?xml version="1.0" encoding="utf-8"?>
-<p:sld xmlns:a="http://schemas.openxmlformats.org/drawingml/2006/main" xmlns:r="http://schemas.openxmlformats.org/officeDocument/2006/relationships" xmlns:p="http://schemas.openxmlformats.org/presentationml/2006/main">
-  <p:cSld>
-    <p:spTree>
-      <p:nvGrpSpPr>
-        <p:cNvPr id="1" name="">
-          <a:extLst>
-            <a:ext uri="{FF2B5EF4-FFF2-40B4-BE49-F238E27FC236}">
-              <a16:creationId xmlns:a16="http://schemas.microsoft.com/office/drawing/2014/main" id="{D7208F18-A555-F6A6-A772-C8B74BAD7ED9}"/>
-            </a:ext>
-          </a:extLst>
-        </p:cNvPr>
-        <p:cNvGrpSpPr/>
-        <p:nvPr/>
-      </p:nvGrpSpPr>
-      <p:grpSpPr>
-        <a:xfrm>
-          <a:off x="0" y="0"/>
-          <a:ext cx="0" cy="0"/>
-          <a:chOff x="0" y="0"/>
-          <a:chExt cx="0" cy="0"/>
-        </a:xfrm>
-      </p:grpSpPr>
-      <p:sp>
-        <p:nvSpPr>
-          <p:cNvPr id="3" name="TextBox 2">
-            <a:extLst>
-              <a:ext uri="{FF2B5EF4-FFF2-40B4-BE49-F238E27FC236}">
-                <a16:creationId xmlns:a16="http://schemas.microsoft.com/office/drawing/2014/main" id="{59A272A3-61FF-EDFE-55F5-39C595FCA59A}"/>
-              </a:ext>
-            </a:extLst>
-          </p:cNvPr>
-          <p:cNvSpPr txBox="1"/>
-          <p:nvPr/>
-        </p:nvSpPr>
-        <p:spPr>
-          <a:xfrm>
-            <a:off x="184278" y="222104"/>
-            <a:ext cx="9174325" cy="2954655"/>
-          </a:xfrm>
-          <a:prstGeom prst="rect">
-            <a:avLst/>
-          </a:prstGeom>
-          <a:noFill/>
-        </p:spPr>
-        <p:txBody>
-          <a:bodyPr wrap="square">
-            <a:spAutoFit/>
-          </a:bodyPr>
-          <a:lstStyle/>
-          <a:p>
-            <a:pPr>
-              <a:buNone/>
-            </a:pPr>
-            <a:r>
-              <a:rPr lang="en-IN" b="1" dirty="0">
-                <a:solidFill>
-                  <a:schemeClr val="accent6">
-                    <a:lumMod val="60000"/>
-                    <a:lumOff val="40000"/>
-                  </a:schemeClr>
-                </a:solidFill>
-              </a:rPr>
-              <a:t>3. Multi-class Classification Problems (One-label)</a:t>
-            </a:r>
-          </a:p>
-          <a:p>
-            <a:r>
-              <a:rPr lang="en-IN" dirty="0">
-                <a:solidFill>
-                  <a:schemeClr val="accent6">
-                    <a:lumMod val="60000"/>
-                    <a:lumOff val="40000"/>
-                  </a:schemeClr>
-                </a:solidFill>
-              </a:rPr>
-              <a:t>Goal: Predict </a:t>
-            </a:r>
-            <a:r>
-              <a:rPr lang="en-IN" b="1" dirty="0">
-                <a:solidFill>
-                  <a:schemeClr val="accent6">
-                    <a:lumMod val="60000"/>
-                    <a:lumOff val="40000"/>
-                  </a:schemeClr>
-                </a:solidFill>
-              </a:rPr>
-              <a:t>one class out of many</a:t>
-            </a:r>
-            <a:r>
-              <a:rPr lang="en-IN" dirty="0">
-                <a:solidFill>
-                  <a:schemeClr val="accent6">
-                    <a:lumMod val="60000"/>
-                    <a:lumOff val="40000"/>
-                  </a:schemeClr>
-                </a:solidFill>
-              </a:rPr>
-              <a:t> (mutually exclusive).</a:t>
-            </a:r>
-          </a:p>
-          <a:p>
-            <a:r>
-              <a:rPr lang="en-IN" b="1" dirty="0">
-                <a:solidFill>
-                  <a:schemeClr val="accent6">
-                    <a:lumMod val="60000"/>
-                    <a:lumOff val="40000"/>
-                  </a:schemeClr>
-                </a:solidFill>
-              </a:rPr>
-              <a:t>Output activation:</a:t>
-            </a:r>
-            <a:endParaRPr lang="en-IN" dirty="0">
-              <a:solidFill>
-                <a:schemeClr val="accent6">
-                  <a:lumMod val="60000"/>
-                  <a:lumOff val="40000"/>
-                </a:schemeClr>
-              </a:solidFill>
-            </a:endParaRPr>
-          </a:p>
-          <a:p>
-            <a:pPr marL="742950" lvl="1" indent="-285750">
-              <a:buFont typeface="Arial" panose="020B0604020202020204" pitchFamily="34" charset="0"/>
-              <a:buChar char="•"/>
-            </a:pPr>
-            <a:r>
-              <a:rPr lang="en-IN" b="1" dirty="0" err="1">
-                <a:solidFill>
-                  <a:schemeClr val="accent6">
-                    <a:lumMod val="60000"/>
-                    <a:lumOff val="40000"/>
-                  </a:schemeClr>
-                </a:solidFill>
-              </a:rPr>
-              <a:t>Softmax</a:t>
-            </a:r>
-            <a:r>
-              <a:rPr lang="en-IN" dirty="0">
-                <a:solidFill>
-                  <a:schemeClr val="accent6">
-                    <a:lumMod val="60000"/>
-                    <a:lumOff val="40000"/>
-                  </a:schemeClr>
-                </a:solidFill>
-              </a:rPr>
-              <a:t> → gives a probability distribution across classes, all adding up to 1.</a:t>
-            </a:r>
-          </a:p>
-          <a:p>
-            <a:endParaRPr lang="en-US" b="1" dirty="0">
-              <a:solidFill>
-                <a:schemeClr val="accent6">
-                  <a:lumMod val="60000"/>
-                  <a:lumOff val="40000"/>
-                </a:schemeClr>
-              </a:solidFill>
-            </a:endParaRPr>
-          </a:p>
-          <a:p>
-            <a:r>
-              <a:rPr lang="en-US" b="1" dirty="0">
-                <a:solidFill>
-                  <a:schemeClr val="accent6">
-                    <a:lumMod val="60000"/>
-                    <a:lumOff val="40000"/>
-                  </a:schemeClr>
-                </a:solidFill>
-              </a:rPr>
-              <a:t>Loss function used here</a:t>
-            </a:r>
-            <a:r>
-              <a:rPr lang="en-US" dirty="0">
-                <a:solidFill>
-                  <a:schemeClr val="accent6">
-                    <a:lumMod val="60000"/>
-                    <a:lumOff val="40000"/>
-                  </a:schemeClr>
-                </a:solidFill>
-              </a:rPr>
-              <a:t>:</a:t>
-            </a:r>
-          </a:p>
-          <a:p>
-            <a:pPr marL="342900" indent="-342900">
-              <a:buFont typeface="+mj-lt"/>
-              <a:buAutoNum type="alphaUcPeriod"/>
-            </a:pPr>
-            <a:r>
-              <a:rPr lang="en-US" b="1" dirty="0">
-                <a:solidFill>
-                  <a:schemeClr val="accent6">
-                    <a:lumMod val="60000"/>
-                    <a:lumOff val="40000"/>
-                  </a:schemeClr>
-                </a:solidFill>
-              </a:rPr>
-              <a:t>Categorical Cross-Entropy</a:t>
-            </a:r>
-            <a:r>
-              <a:rPr lang="en-US" dirty="0">
-                <a:solidFill>
-                  <a:schemeClr val="accent6">
-                    <a:lumMod val="60000"/>
-                    <a:lumOff val="40000"/>
-                  </a:schemeClr>
-                </a:solidFill>
-              </a:rPr>
-              <a:t> (when labels are one-hot encoded)</a:t>
-            </a:r>
-          </a:p>
-          <a:p>
-            <a:pPr marL="342900" indent="-342900">
-              <a:buFont typeface="+mj-lt"/>
-              <a:buAutoNum type="alphaUcPeriod"/>
-            </a:pPr>
-            <a:r>
-              <a:rPr lang="en-US" b="1" dirty="0">
-                <a:solidFill>
-                  <a:schemeClr val="accent6">
-                    <a:lumMod val="60000"/>
-                    <a:lumOff val="40000"/>
-                  </a:schemeClr>
-                </a:solidFill>
-              </a:rPr>
-              <a:t>Sparse Categorical Cross-Entropy</a:t>
-            </a:r>
-            <a:r>
-              <a:rPr lang="en-US" dirty="0">
-                <a:solidFill>
-                  <a:schemeClr val="accent6">
-                    <a:lumMod val="60000"/>
-                    <a:lumOff val="40000"/>
-                  </a:schemeClr>
-                </a:solidFill>
-              </a:rPr>
-              <a:t> (when labels are integers, not one-hot).</a:t>
-            </a:r>
-            <a:endParaRPr lang="en-IN" dirty="0">
-              <a:solidFill>
-                <a:schemeClr val="accent6">
-                  <a:lumMod val="60000"/>
-                  <a:lumOff val="40000"/>
-                </a:schemeClr>
-              </a:solidFill>
-            </a:endParaRPr>
-          </a:p>
-          <a:p>
-            <a:pPr lvl="1"/>
-            <a:endParaRPr lang="en-IN" dirty="0">
-              <a:solidFill>
-                <a:schemeClr val="accent6">
-                  <a:lumMod val="60000"/>
-                  <a:lumOff val="40000"/>
-                </a:schemeClr>
-              </a:solidFill>
-            </a:endParaRPr>
-          </a:p>
-          <a:p>
-            <a:pPr>
-              <a:buNone/>
-            </a:pPr>
-            <a:r>
-              <a:rPr lang="en-IN" dirty="0">
-                <a:solidFill>
-                  <a:schemeClr val="accent6">
-                    <a:lumMod val="60000"/>
-                    <a:lumOff val="40000"/>
-                  </a:schemeClr>
-                </a:solidFill>
-              </a:rPr>
-              <a:t> Example: Handwritten digit recognition (0–9).</a:t>
-            </a:r>
-          </a:p>
-        </p:txBody>
-      </p:sp>
-      <p:pic>
-        <p:nvPicPr>
-          <p:cNvPr id="5" name="Picture 4">
-            <a:extLst>
-              <a:ext uri="{FF2B5EF4-FFF2-40B4-BE49-F238E27FC236}">
-                <a16:creationId xmlns:a16="http://schemas.microsoft.com/office/drawing/2014/main" id="{AC27F26F-9BEE-1E04-EA99-257AEB190CDE}"/>
-              </a:ext>
-            </a:extLst>
-          </p:cNvPr>
-          <p:cNvPicPr>
-            <a:picLocks noChangeAspect="1"/>
-          </p:cNvPicPr>
-          <p:nvPr/>
-        </p:nvPicPr>
-        <p:blipFill>
-          <a:blip r:embed="rId2">
-            <a:extLst>
-              <a:ext uri="{28A0092B-C50C-407E-A947-70E740481C1C}">
-                <a14:useLocalDpi xmlns:a14="http://schemas.microsoft.com/office/drawing/2010/main" val="0"/>
-              </a:ext>
-            </a:extLst>
-          </a:blip>
-          <a:stretch>
-            <a:fillRect/>
-          </a:stretch>
-        </p:blipFill>
-        <p:spPr>
-          <a:xfrm>
-            <a:off x="8830571" y="847262"/>
-            <a:ext cx="1752752" cy="815411"/>
-          </a:xfrm>
-          <a:prstGeom prst="rect">
-            <a:avLst/>
-          </a:prstGeom>
-        </p:spPr>
-      </p:pic>
-      <p:pic>
-        <p:nvPicPr>
-          <p:cNvPr id="4" name="Picture 3">
-            <a:extLst>
-              <a:ext uri="{FF2B5EF4-FFF2-40B4-BE49-F238E27FC236}">
-                <a16:creationId xmlns:a16="http://schemas.microsoft.com/office/drawing/2014/main" id="{A1E57198-8072-ED8B-D0D8-88871A2C1D4E}"/>
-              </a:ext>
-            </a:extLst>
-          </p:cNvPr>
-          <p:cNvPicPr>
-            <a:picLocks noChangeAspect="1"/>
-          </p:cNvPicPr>
-          <p:nvPr/>
-        </p:nvPicPr>
-        <p:blipFill>
-          <a:blip r:embed="rId3">
-            <a:extLst>
-              <a:ext uri="{28A0092B-C50C-407E-A947-70E740481C1C}">
-                <a14:useLocalDpi xmlns:a14="http://schemas.microsoft.com/office/drawing/2010/main" val="0"/>
-              </a:ext>
-            </a:extLst>
-          </a:blip>
-          <a:stretch>
-            <a:fillRect/>
-          </a:stretch>
-        </p:blipFill>
-        <p:spPr>
-          <a:xfrm>
-            <a:off x="8964133" y="1970833"/>
-            <a:ext cx="2194750" cy="434378"/>
-          </a:xfrm>
-          <a:prstGeom prst="rect">
-            <a:avLst/>
-          </a:prstGeom>
-        </p:spPr>
-      </p:pic>
-      <p:cxnSp>
-        <p:nvCxnSpPr>
-          <p:cNvPr id="8" name="Straight Arrow Connector 7">
-            <a:extLst>
-              <a:ext uri="{FF2B5EF4-FFF2-40B4-BE49-F238E27FC236}">
-                <a16:creationId xmlns:a16="http://schemas.microsoft.com/office/drawing/2014/main" id="{773F6E83-6AA1-40FD-F250-706A32C65AD8}"/>
-              </a:ext>
-            </a:extLst>
-          </p:cNvPr>
-          <p:cNvCxnSpPr/>
-          <p:nvPr/>
-        </p:nvCxnSpPr>
-        <p:spPr>
-          <a:xfrm>
-            <a:off x="6531429" y="1970833"/>
-            <a:ext cx="2432704" cy="221861"/>
-          </a:xfrm>
-          <a:prstGeom prst="straightConnector1">
-            <a:avLst/>
-          </a:prstGeom>
-          <a:ln>
-            <a:tailEnd type="triangle"/>
-          </a:ln>
-        </p:spPr>
-        <p:style>
-          <a:lnRef idx="1">
-            <a:schemeClr val="accent1"/>
-          </a:lnRef>
-          <a:fillRef idx="0">
-            <a:schemeClr val="accent1"/>
-          </a:fillRef>
-          <a:effectRef idx="0">
-            <a:schemeClr val="accent1"/>
-          </a:effectRef>
-          <a:fontRef idx="minor">
-            <a:schemeClr val="tx1"/>
-          </a:fontRef>
-        </p:style>
-      </p:cxnSp>
-    </p:spTree>
-    <p:extLst>
-      <p:ext uri="{BB962C8B-B14F-4D97-AF65-F5344CB8AC3E}">
-        <p14:creationId xmlns:p14="http://schemas.microsoft.com/office/powerpoint/2010/main" val="1806365296"/>
-      </p:ext>
-    </p:extLst>
-  </p:cSld>
-  <p:clrMapOvr>
-    <a:masterClrMapping/>
-  </p:clrMapOvr>
-</p:sld>
-</file>
-
-<file path=ppt/slides/slide17.xml><?xml version="1.0" encoding="utf-8"?>
-<p:sld xmlns:a="http://schemas.openxmlformats.org/drawingml/2006/main" xmlns:r="http://schemas.openxmlformats.org/officeDocument/2006/relationships" xmlns:p="http://schemas.openxmlformats.org/presentationml/2006/main">
-  <p:cSld>
-    <p:spTree>
-      <p:nvGrpSpPr>
-        <p:cNvPr id="1" name="">
-          <a:extLst>
-            <a:ext uri="{FF2B5EF4-FFF2-40B4-BE49-F238E27FC236}">
-              <a16:creationId xmlns:a16="http://schemas.microsoft.com/office/drawing/2014/main" id="{A56A8F71-80E7-1A25-7B75-EBCA30E170CF}"/>
-            </a:ext>
-          </a:extLst>
-        </p:cNvPr>
-        <p:cNvGrpSpPr/>
-        <p:nvPr/>
-      </p:nvGrpSpPr>
-      <p:grpSpPr>
-        <a:xfrm>
-          <a:off x="0" y="0"/>
-          <a:ext cx="0" cy="0"/>
-          <a:chOff x="0" y="0"/>
-          <a:chExt cx="0" cy="0"/>
-        </a:xfrm>
-      </p:grpSpPr>
-      <p:sp>
-        <p:nvSpPr>
-          <p:cNvPr id="7" name="TextBox 6">
-            <a:extLst>
-              <a:ext uri="{FF2B5EF4-FFF2-40B4-BE49-F238E27FC236}">
-                <a16:creationId xmlns:a16="http://schemas.microsoft.com/office/drawing/2014/main" id="{4BCCC2C7-C5C0-E699-9CE3-9BABBB39F9CF}"/>
-              </a:ext>
-            </a:extLst>
-          </p:cNvPr>
-          <p:cNvSpPr txBox="1"/>
-          <p:nvPr/>
-        </p:nvSpPr>
-        <p:spPr>
-          <a:xfrm>
-            <a:off x="314909" y="680010"/>
-            <a:ext cx="9454242" cy="2862322"/>
-          </a:xfrm>
-          <a:prstGeom prst="rect">
-            <a:avLst/>
-          </a:prstGeom>
-          <a:noFill/>
-        </p:spPr>
-        <p:txBody>
-          <a:bodyPr wrap="square">
-            <a:spAutoFit/>
-          </a:bodyPr>
-          <a:lstStyle/>
-          <a:p>
-            <a:pPr>
-              <a:buNone/>
-            </a:pPr>
-            <a:r>
-              <a:rPr lang="en-US" b="1" dirty="0">
-                <a:solidFill>
-                  <a:schemeClr val="accent6">
-                    <a:lumMod val="60000"/>
-                    <a:lumOff val="40000"/>
-                  </a:schemeClr>
-                </a:solidFill>
-              </a:rPr>
-              <a:t>4. Multi-label Classification Problems (Multiple labels possible)</a:t>
-            </a:r>
-          </a:p>
-          <a:p>
-            <a:r>
-              <a:rPr lang="en-US" dirty="0">
-                <a:solidFill>
-                  <a:schemeClr val="accent6">
-                    <a:lumMod val="60000"/>
-                    <a:lumOff val="40000"/>
-                  </a:schemeClr>
-                </a:solidFill>
-              </a:rPr>
-              <a:t>Goal: Predict </a:t>
-            </a:r>
-            <a:r>
-              <a:rPr lang="en-US" b="1" dirty="0">
-                <a:solidFill>
-                  <a:schemeClr val="accent6">
-                    <a:lumMod val="60000"/>
-                    <a:lumOff val="40000"/>
-                  </a:schemeClr>
-                </a:solidFill>
-              </a:rPr>
-              <a:t>multiple independent labels</a:t>
-            </a:r>
-            <a:r>
-              <a:rPr lang="en-US" dirty="0">
-                <a:solidFill>
-                  <a:schemeClr val="accent6">
-                    <a:lumMod val="60000"/>
-                    <a:lumOff val="40000"/>
-                  </a:schemeClr>
-                </a:solidFill>
-              </a:rPr>
-              <a:t> (not mutually exclusive).</a:t>
-            </a:r>
-          </a:p>
-          <a:p>
-            <a:r>
-              <a:rPr lang="en-US" b="1" dirty="0">
-                <a:solidFill>
-                  <a:schemeClr val="accent6">
-                    <a:lumMod val="60000"/>
-                    <a:lumOff val="40000"/>
-                  </a:schemeClr>
-                </a:solidFill>
-              </a:rPr>
-              <a:t>Output activation:</a:t>
-            </a:r>
-            <a:endParaRPr lang="en-US" dirty="0">
-              <a:solidFill>
-                <a:schemeClr val="accent6">
-                  <a:lumMod val="60000"/>
-                  <a:lumOff val="40000"/>
-                </a:schemeClr>
-              </a:solidFill>
-            </a:endParaRPr>
-          </a:p>
-          <a:p>
-            <a:pPr marL="742950" lvl="1" indent="-285750">
-              <a:buFont typeface="Arial" panose="020B0604020202020204" pitchFamily="34" charset="0"/>
-              <a:buChar char="•"/>
-            </a:pPr>
-            <a:r>
-              <a:rPr lang="en-US" b="1" dirty="0">
-                <a:solidFill>
-                  <a:schemeClr val="accent6">
-                    <a:lumMod val="60000"/>
-                    <a:lumOff val="40000"/>
-                  </a:schemeClr>
-                </a:solidFill>
-              </a:rPr>
-              <a:t>Sigmoid (per output node)</a:t>
-            </a:r>
-            <a:r>
-              <a:rPr lang="en-US" dirty="0">
-                <a:solidFill>
-                  <a:schemeClr val="accent6">
-                    <a:lumMod val="60000"/>
-                    <a:lumOff val="40000"/>
-                  </a:schemeClr>
-                </a:solidFill>
-              </a:rPr>
-              <a:t> → each output is treated as independent probability.</a:t>
-            </a:r>
-          </a:p>
-          <a:p>
-            <a:endParaRPr lang="en-US" b="1" dirty="0">
-              <a:solidFill>
-                <a:schemeClr val="accent6">
-                  <a:lumMod val="60000"/>
-                  <a:lumOff val="40000"/>
-                </a:schemeClr>
-              </a:solidFill>
-            </a:endParaRPr>
-          </a:p>
-          <a:p>
-            <a:r>
-              <a:rPr lang="en-US" b="1" dirty="0">
-                <a:solidFill>
-                  <a:schemeClr val="accent6">
-                    <a:lumMod val="60000"/>
-                    <a:lumOff val="40000"/>
-                  </a:schemeClr>
-                </a:solidFill>
-              </a:rPr>
-              <a:t>Loss function used here</a:t>
-            </a:r>
-            <a:r>
-              <a:rPr lang="en-US" dirty="0">
-                <a:solidFill>
-                  <a:schemeClr val="accent6">
-                    <a:lumMod val="60000"/>
-                    <a:lumOff val="40000"/>
-                  </a:schemeClr>
-                </a:solidFill>
-              </a:rPr>
-              <a:t>:</a:t>
-            </a:r>
-          </a:p>
-          <a:p>
-            <a:r>
-              <a:rPr lang="en-US" b="1" dirty="0">
-                <a:solidFill>
-                  <a:schemeClr val="accent6">
-                    <a:lumMod val="60000"/>
-                    <a:lumOff val="40000"/>
-                  </a:schemeClr>
-                </a:solidFill>
-              </a:rPr>
-              <a:t>Binary Cross-Entropy</a:t>
-            </a:r>
-            <a:r>
-              <a:rPr lang="en-US" dirty="0">
-                <a:solidFill>
-                  <a:schemeClr val="accent6">
-                    <a:lumMod val="60000"/>
-                    <a:lumOff val="40000"/>
-                  </a:schemeClr>
-                </a:solidFill>
-              </a:rPr>
-              <a:t> applied </a:t>
-            </a:r>
-            <a:r>
-              <a:rPr lang="en-US" b="1" dirty="0">
-                <a:solidFill>
-                  <a:schemeClr val="accent6">
-                    <a:lumMod val="60000"/>
-                    <a:lumOff val="40000"/>
-                  </a:schemeClr>
-                </a:solidFill>
-              </a:rPr>
-              <a:t>independently per label</a:t>
-            </a:r>
-            <a:r>
-              <a:rPr lang="en-US" dirty="0">
-                <a:solidFill>
-                  <a:schemeClr val="accent6">
-                    <a:lumMod val="60000"/>
-                    <a:lumOff val="40000"/>
-                  </a:schemeClr>
-                </a:solidFill>
-              </a:rPr>
-              <a:t>.</a:t>
-            </a:r>
-          </a:p>
-          <a:p>
-            <a:pPr lvl="1"/>
-            <a:endParaRPr lang="en-US" dirty="0">
-              <a:solidFill>
-                <a:schemeClr val="accent6">
-                  <a:lumMod val="60000"/>
-                  <a:lumOff val="40000"/>
-                </a:schemeClr>
-              </a:solidFill>
-            </a:endParaRPr>
-          </a:p>
-          <a:p>
-            <a:pPr>
-              <a:buNone/>
-            </a:pPr>
-            <a:r>
-              <a:rPr lang="en-US" dirty="0">
-                <a:solidFill>
-                  <a:schemeClr val="accent6">
-                    <a:lumMod val="60000"/>
-                    <a:lumOff val="40000"/>
-                  </a:schemeClr>
-                </a:solidFill>
-              </a:rPr>
-              <a:t>Example: Predicting which tags apply to a movie (action, comedy, romance — could be more than one).</a:t>
-            </a:r>
-          </a:p>
-        </p:txBody>
-      </p:sp>
-    </p:spTree>
-    <p:extLst>
-      <p:ext uri="{BB962C8B-B14F-4D97-AF65-F5344CB8AC3E}">
-        <p14:creationId xmlns:p14="http://schemas.microsoft.com/office/powerpoint/2010/main" val="150377361"/>
-      </p:ext>
-    </p:extLst>
-  </p:cSld>
-  <p:clrMapOvr>
-    <a:masterClrMapping/>
-  </p:clrMapOvr>
-</p:sld>
-</file>
-
-<file path=ppt/slides/slide18.xml><?xml version="1.0" encoding="utf-8"?>
 <p:sld xmlns:a="http://schemas.openxmlformats.org/drawingml/2006/main" xmlns:r="http://schemas.openxmlformats.org/officeDocument/2006/relationships" xmlns:p="http://schemas.openxmlformats.org/presentationml/2006/main">
   <p:cSld>
     <p:spTree>
@@ -6602,7 +5065,7 @@
           <a:p>
             <a:fld id="{2E30D265-8AE4-4D83-9D5E-333CB7475336}" type="slidenum">
               <a:rPr lang="en-US" smtClean="0"/>
-              <a:t>18</a:t>
+              <a:t>14</a:t>
             </a:fld>
             <a:endParaRPr lang="en-US"/>
           </a:p>
@@ -6621,7 +5084,7 @@
 </p:sld>
 </file>
 
-<file path=ppt/slides/slide19.xml><?xml version="1.0" encoding="utf-8"?>
+<file path=ppt/slides/slide15.xml><?xml version="1.0" encoding="utf-8"?>
 <p:sld xmlns:a="http://schemas.openxmlformats.org/drawingml/2006/main" xmlns:r="http://schemas.openxmlformats.org/officeDocument/2006/relationships" xmlns:p="http://schemas.openxmlformats.org/presentationml/2006/main">
   <p:cSld>
     <p:spTree>
@@ -6667,7 +5130,7 @@
           <a:p>
             <a:fld id="{2E30D265-8AE4-4D83-9D5E-333CB7475336}" type="slidenum">
               <a:rPr lang="en-US" smtClean="0"/>
-              <a:t>19</a:t>
+              <a:t>15</a:t>
             </a:fld>
             <a:endParaRPr lang="en-US"/>
           </a:p>
@@ -6677,6 +5140,219 @@
     <p:extLst>
       <p:ext uri="{BB962C8B-B14F-4D97-AF65-F5344CB8AC3E}">
         <p14:creationId xmlns:p14="http://schemas.microsoft.com/office/powerpoint/2010/main" val="3235577400"/>
+      </p:ext>
+    </p:extLst>
+  </p:cSld>
+  <p:clrMapOvr>
+    <a:masterClrMapping/>
+  </p:clrMapOvr>
+</p:sld>
+</file>
+
+<file path=ppt/slides/slide16.xml><?xml version="1.0" encoding="utf-8"?>
+<p:sld xmlns:a="http://schemas.openxmlformats.org/drawingml/2006/main" xmlns:r="http://schemas.openxmlformats.org/officeDocument/2006/relationships" xmlns:p="http://schemas.openxmlformats.org/presentationml/2006/main">
+  <p:cSld>
+    <p:spTree>
+      <p:nvGrpSpPr>
+        <p:cNvPr id="1" name="">
+          <a:extLst>
+            <a:ext uri="{FF2B5EF4-FFF2-40B4-BE49-F238E27FC236}">
+              <a16:creationId xmlns:a16="http://schemas.microsoft.com/office/drawing/2014/main" id="{67B0E027-BD30-4147-CCD5-71315A3A930D}"/>
+            </a:ext>
+          </a:extLst>
+        </p:cNvPr>
+        <p:cNvGrpSpPr/>
+        <p:nvPr/>
+      </p:nvGrpSpPr>
+      <p:grpSpPr>
+        <a:xfrm>
+          <a:off x="0" y="0"/>
+          <a:ext cx="0" cy="0"/>
+          <a:chOff x="0" y="0"/>
+          <a:chExt cx="0" cy="0"/>
+        </a:xfrm>
+      </p:grpSpPr>
+      <p:sp>
+        <p:nvSpPr>
+          <p:cNvPr id="4" name="Slide Number Placeholder 3">
+            <a:extLst>
+              <a:ext uri="{FF2B5EF4-FFF2-40B4-BE49-F238E27FC236}">
+                <a16:creationId xmlns:a16="http://schemas.microsoft.com/office/drawing/2014/main" id="{559969C1-1C8C-9D4D-2429-D10937B26966}"/>
+              </a:ext>
+            </a:extLst>
+          </p:cNvPr>
+          <p:cNvSpPr>
+            <a:spLocks noGrp="1"/>
+          </p:cNvSpPr>
+          <p:nvPr>
+            <p:ph type="sldNum" sz="quarter" idx="12"/>
+          </p:nvPr>
+        </p:nvSpPr>
+        <p:spPr/>
+        <p:txBody>
+          <a:bodyPr/>
+          <a:lstStyle/>
+          <a:p>
+            <a:fld id="{2E30D265-8AE4-4D83-9D5E-333CB7475336}" type="slidenum">
+              <a:rPr lang="en-US" smtClean="0"/>
+              <a:t>16</a:t>
+            </a:fld>
+            <a:endParaRPr lang="en-US"/>
+          </a:p>
+        </p:txBody>
+      </p:sp>
+    </p:spTree>
+    <p:extLst>
+      <p:ext uri="{BB962C8B-B14F-4D97-AF65-F5344CB8AC3E}">
+        <p14:creationId xmlns:p14="http://schemas.microsoft.com/office/powerpoint/2010/main" val="2751183021"/>
+      </p:ext>
+    </p:extLst>
+  </p:cSld>
+  <p:clrMapOvr>
+    <a:masterClrMapping/>
+  </p:clrMapOvr>
+</p:sld>
+</file>
+
+<file path=ppt/slides/slide17.xml><?xml version="1.0" encoding="utf-8"?>
+<p:sld xmlns:a="http://schemas.openxmlformats.org/drawingml/2006/main" xmlns:r="http://schemas.openxmlformats.org/officeDocument/2006/relationships" xmlns:p="http://schemas.openxmlformats.org/presentationml/2006/main">
+  <p:cSld>
+    <p:spTree>
+      <p:nvGrpSpPr>
+        <p:cNvPr id="1" name="">
+          <a:extLst>
+            <a:ext uri="{FF2B5EF4-FFF2-40B4-BE49-F238E27FC236}">
+              <a16:creationId xmlns:a16="http://schemas.microsoft.com/office/drawing/2014/main" id="{DD931D7F-4279-DA2E-FA64-6CF3C441D414}"/>
+            </a:ext>
+          </a:extLst>
+        </p:cNvPr>
+        <p:cNvGrpSpPr/>
+        <p:nvPr/>
+      </p:nvGrpSpPr>
+      <p:grpSpPr>
+        <a:xfrm>
+          <a:off x="0" y="0"/>
+          <a:ext cx="0" cy="0"/>
+          <a:chOff x="0" y="0"/>
+          <a:chExt cx="0" cy="0"/>
+        </a:xfrm>
+      </p:grpSpPr>
+      <p:sp>
+        <p:nvSpPr>
+          <p:cNvPr id="2" name="Title 1">
+            <a:extLst>
+              <a:ext uri="{FF2B5EF4-FFF2-40B4-BE49-F238E27FC236}">
+                <a16:creationId xmlns:a16="http://schemas.microsoft.com/office/drawing/2014/main" id="{795E1B75-886E-0812-B2FD-DD250C225521}"/>
+              </a:ext>
+            </a:extLst>
+          </p:cNvPr>
+          <p:cNvSpPr>
+            <a:spLocks noGrp="1"/>
+          </p:cNvSpPr>
+          <p:nvPr>
+            <p:ph type="title"/>
+          </p:nvPr>
+        </p:nvSpPr>
+        <p:spPr>
+          <a:xfrm>
+            <a:off x="274320" y="136525"/>
+            <a:ext cx="11466576" cy="832739"/>
+          </a:xfrm>
+        </p:spPr>
+        <p:txBody>
+          <a:bodyPr>
+            <a:normAutofit/>
+          </a:bodyPr>
+          <a:lstStyle/>
+          <a:p>
+            <a:r>
+              <a:rPr lang="en-US" sz="3600" dirty="0"/>
+              <a:t>EXTRA</a:t>
+            </a:r>
+          </a:p>
+        </p:txBody>
+      </p:sp>
+      <p:sp>
+        <p:nvSpPr>
+          <p:cNvPr id="4" name="TextBox 3">
+            <a:extLst>
+              <a:ext uri="{FF2B5EF4-FFF2-40B4-BE49-F238E27FC236}">
+                <a16:creationId xmlns:a16="http://schemas.microsoft.com/office/drawing/2014/main" id="{902F8BE4-9CEA-0DAD-0357-E0A8215F169D}"/>
+              </a:ext>
+            </a:extLst>
+          </p:cNvPr>
+          <p:cNvSpPr txBox="1"/>
+          <p:nvPr/>
+        </p:nvSpPr>
+        <p:spPr>
+          <a:xfrm>
+            <a:off x="274320" y="933117"/>
+            <a:ext cx="11658600" cy="646331"/>
+          </a:xfrm>
+          <a:prstGeom prst="rect">
+            <a:avLst/>
+          </a:prstGeom>
+          <a:noFill/>
+        </p:spPr>
+        <p:txBody>
+          <a:bodyPr wrap="square">
+            <a:spAutoFit/>
+          </a:bodyPr>
+          <a:lstStyle/>
+          <a:p>
+            <a:pPr marL="0" indent="0">
+              <a:buNone/>
+            </a:pPr>
+            <a:r>
+              <a:rPr lang="en-US" dirty="0" err="1">
+                <a:solidFill>
+                  <a:schemeClr val="accent6">
+                    <a:lumMod val="60000"/>
+                    <a:lumOff val="40000"/>
+                  </a:schemeClr>
+                </a:solidFill>
+              </a:rPr>
+              <a:t>Xxxxxxxxxxx</a:t>
+            </a:r>
+            <a:endParaRPr lang="en-US" dirty="0">
+              <a:solidFill>
+                <a:schemeClr val="accent6">
+                  <a:lumMod val="60000"/>
+                  <a:lumOff val="40000"/>
+                </a:schemeClr>
+              </a:solidFill>
+            </a:endParaRPr>
+          </a:p>
+          <a:p>
+            <a:pPr marL="0" indent="0">
+              <a:buNone/>
+            </a:pPr>
+            <a:r>
+              <a:rPr lang="en-US" dirty="0" err="1">
+                <a:solidFill>
+                  <a:schemeClr val="accent6">
+                    <a:lumMod val="60000"/>
+                    <a:lumOff val="40000"/>
+                  </a:schemeClr>
+                </a:solidFill>
+              </a:rPr>
+              <a:t>xxxxxxxxxxxx</a:t>
+            </a:r>
+            <a:endParaRPr lang="en-US" dirty="0">
+              <a:solidFill>
+                <a:schemeClr val="accent6">
+                  <a:lumMod val="60000"/>
+                  <a:lumOff val="40000"/>
+                </a:schemeClr>
+              </a:solidFill>
+            </a:endParaRPr>
+          </a:p>
+        </p:txBody>
+      </p:sp>
+    </p:spTree>
+    <p:extLst>
+      <p:ext uri="{BB962C8B-B14F-4D97-AF65-F5344CB8AC3E}">
+        <p14:creationId xmlns:p14="http://schemas.microsoft.com/office/powerpoint/2010/main" val="366625378"/>
       </p:ext>
     </p:extLst>
   </p:cSld>
@@ -6812,219 +5488,6 @@
     <p:extLst>
       <p:ext uri="{BB962C8B-B14F-4D97-AF65-F5344CB8AC3E}">
         <p14:creationId xmlns:p14="http://schemas.microsoft.com/office/powerpoint/2010/main" val="1205851491"/>
-      </p:ext>
-    </p:extLst>
-  </p:cSld>
-  <p:clrMapOvr>
-    <a:masterClrMapping/>
-  </p:clrMapOvr>
-</p:sld>
-</file>
-
-<file path=ppt/slides/slide20.xml><?xml version="1.0" encoding="utf-8"?>
-<p:sld xmlns:a="http://schemas.openxmlformats.org/drawingml/2006/main" xmlns:r="http://schemas.openxmlformats.org/officeDocument/2006/relationships" xmlns:p="http://schemas.openxmlformats.org/presentationml/2006/main">
-  <p:cSld>
-    <p:spTree>
-      <p:nvGrpSpPr>
-        <p:cNvPr id="1" name="">
-          <a:extLst>
-            <a:ext uri="{FF2B5EF4-FFF2-40B4-BE49-F238E27FC236}">
-              <a16:creationId xmlns:a16="http://schemas.microsoft.com/office/drawing/2014/main" id="{67B0E027-BD30-4147-CCD5-71315A3A930D}"/>
-            </a:ext>
-          </a:extLst>
-        </p:cNvPr>
-        <p:cNvGrpSpPr/>
-        <p:nvPr/>
-      </p:nvGrpSpPr>
-      <p:grpSpPr>
-        <a:xfrm>
-          <a:off x="0" y="0"/>
-          <a:ext cx="0" cy="0"/>
-          <a:chOff x="0" y="0"/>
-          <a:chExt cx="0" cy="0"/>
-        </a:xfrm>
-      </p:grpSpPr>
-      <p:sp>
-        <p:nvSpPr>
-          <p:cNvPr id="4" name="Slide Number Placeholder 3">
-            <a:extLst>
-              <a:ext uri="{FF2B5EF4-FFF2-40B4-BE49-F238E27FC236}">
-                <a16:creationId xmlns:a16="http://schemas.microsoft.com/office/drawing/2014/main" id="{559969C1-1C8C-9D4D-2429-D10937B26966}"/>
-              </a:ext>
-            </a:extLst>
-          </p:cNvPr>
-          <p:cNvSpPr>
-            <a:spLocks noGrp="1"/>
-          </p:cNvSpPr>
-          <p:nvPr>
-            <p:ph type="sldNum" sz="quarter" idx="12"/>
-          </p:nvPr>
-        </p:nvSpPr>
-        <p:spPr/>
-        <p:txBody>
-          <a:bodyPr/>
-          <a:lstStyle/>
-          <a:p>
-            <a:fld id="{2E30D265-8AE4-4D83-9D5E-333CB7475336}" type="slidenum">
-              <a:rPr lang="en-US" smtClean="0"/>
-              <a:t>20</a:t>
-            </a:fld>
-            <a:endParaRPr lang="en-US"/>
-          </a:p>
-        </p:txBody>
-      </p:sp>
-    </p:spTree>
-    <p:extLst>
-      <p:ext uri="{BB962C8B-B14F-4D97-AF65-F5344CB8AC3E}">
-        <p14:creationId xmlns:p14="http://schemas.microsoft.com/office/powerpoint/2010/main" val="2751183021"/>
-      </p:ext>
-    </p:extLst>
-  </p:cSld>
-  <p:clrMapOvr>
-    <a:masterClrMapping/>
-  </p:clrMapOvr>
-</p:sld>
-</file>
-
-<file path=ppt/slides/slide21.xml><?xml version="1.0" encoding="utf-8"?>
-<p:sld xmlns:a="http://schemas.openxmlformats.org/drawingml/2006/main" xmlns:r="http://schemas.openxmlformats.org/officeDocument/2006/relationships" xmlns:p="http://schemas.openxmlformats.org/presentationml/2006/main">
-  <p:cSld>
-    <p:spTree>
-      <p:nvGrpSpPr>
-        <p:cNvPr id="1" name="">
-          <a:extLst>
-            <a:ext uri="{FF2B5EF4-FFF2-40B4-BE49-F238E27FC236}">
-              <a16:creationId xmlns:a16="http://schemas.microsoft.com/office/drawing/2014/main" id="{DD931D7F-4279-DA2E-FA64-6CF3C441D414}"/>
-            </a:ext>
-          </a:extLst>
-        </p:cNvPr>
-        <p:cNvGrpSpPr/>
-        <p:nvPr/>
-      </p:nvGrpSpPr>
-      <p:grpSpPr>
-        <a:xfrm>
-          <a:off x="0" y="0"/>
-          <a:ext cx="0" cy="0"/>
-          <a:chOff x="0" y="0"/>
-          <a:chExt cx="0" cy="0"/>
-        </a:xfrm>
-      </p:grpSpPr>
-      <p:sp>
-        <p:nvSpPr>
-          <p:cNvPr id="2" name="Title 1">
-            <a:extLst>
-              <a:ext uri="{FF2B5EF4-FFF2-40B4-BE49-F238E27FC236}">
-                <a16:creationId xmlns:a16="http://schemas.microsoft.com/office/drawing/2014/main" id="{795E1B75-886E-0812-B2FD-DD250C225521}"/>
-              </a:ext>
-            </a:extLst>
-          </p:cNvPr>
-          <p:cNvSpPr>
-            <a:spLocks noGrp="1"/>
-          </p:cNvSpPr>
-          <p:nvPr>
-            <p:ph type="title"/>
-          </p:nvPr>
-        </p:nvSpPr>
-        <p:spPr>
-          <a:xfrm>
-            <a:off x="274320" y="136525"/>
-            <a:ext cx="11466576" cy="832739"/>
-          </a:xfrm>
-        </p:spPr>
-        <p:txBody>
-          <a:bodyPr>
-            <a:normAutofit/>
-          </a:bodyPr>
-          <a:lstStyle/>
-          <a:p>
-            <a:r>
-              <a:rPr lang="en-US" sz="3600" dirty="0"/>
-              <a:t>EXTRA</a:t>
-            </a:r>
-          </a:p>
-        </p:txBody>
-      </p:sp>
-      <p:sp>
-        <p:nvSpPr>
-          <p:cNvPr id="4" name="TextBox 3">
-            <a:extLst>
-              <a:ext uri="{FF2B5EF4-FFF2-40B4-BE49-F238E27FC236}">
-                <a16:creationId xmlns:a16="http://schemas.microsoft.com/office/drawing/2014/main" id="{902F8BE4-9CEA-0DAD-0357-E0A8215F169D}"/>
-              </a:ext>
-            </a:extLst>
-          </p:cNvPr>
-          <p:cNvSpPr txBox="1"/>
-          <p:nvPr/>
-        </p:nvSpPr>
-        <p:spPr>
-          <a:xfrm>
-            <a:off x="274320" y="933117"/>
-            <a:ext cx="11658600" cy="646331"/>
-          </a:xfrm>
-          <a:prstGeom prst="rect">
-            <a:avLst/>
-          </a:prstGeom>
-          <a:noFill/>
-        </p:spPr>
-        <p:txBody>
-          <a:bodyPr wrap="square">
-            <a:spAutoFit/>
-          </a:bodyPr>
-          <a:lstStyle/>
-          <a:p>
-            <a:pPr marL="0" indent="0">
-              <a:buNone/>
-            </a:pPr>
-            <a:r>
-              <a:rPr lang="en-US" dirty="0" err="1">
-                <a:solidFill>
-                  <a:schemeClr val="accent6">
-                    <a:lumMod val="60000"/>
-                    <a:lumOff val="40000"/>
-                  </a:schemeClr>
-                </a:solidFill>
-              </a:rPr>
-              <a:t>Xxxxxxxxxxx</a:t>
-            </a:r>
-            <a:endParaRPr lang="en-US" dirty="0">
-              <a:solidFill>
-                <a:schemeClr val="accent6">
-                  <a:lumMod val="60000"/>
-                  <a:lumOff val="40000"/>
-                </a:schemeClr>
-              </a:solidFill>
-            </a:endParaRPr>
-          </a:p>
-          <a:p>
-            <a:pPr marL="0" indent="0">
-              <a:buNone/>
-            </a:pPr>
-            <a:r>
-              <a:rPr lang="en-US" dirty="0" err="1">
-                <a:solidFill>
-                  <a:schemeClr val="accent6">
-                    <a:lumMod val="60000"/>
-                    <a:lumOff val="40000"/>
-                  </a:schemeClr>
-                </a:solidFill>
-              </a:rPr>
-              <a:t>xxxxxxxxxxxx</a:t>
-            </a:r>
-            <a:endParaRPr lang="en-US" dirty="0">
-              <a:solidFill>
-                <a:schemeClr val="accent6">
-                  <a:lumMod val="60000"/>
-                  <a:lumOff val="40000"/>
-                </a:schemeClr>
-              </a:solidFill>
-            </a:endParaRPr>
-          </a:p>
-        </p:txBody>
-      </p:sp>
-    </p:spTree>
-    <p:extLst>
-      <p:ext uri="{BB962C8B-B14F-4D97-AF65-F5344CB8AC3E}">
-        <p14:creationId xmlns:p14="http://schemas.microsoft.com/office/powerpoint/2010/main" val="366625378"/>
       </p:ext>
     </p:extLst>
   </p:cSld>
